--- a/topic-05-week5/unit-1/talk-3-Cables/ethernet-cables.pptx
+++ b/topic-05-week5/unit-1/talk-3-Cables/ethernet-cables.pptx
@@ -394,7 +394,7 @@
           <a:p>
             <a:fld id="{FD4AA955-FD35-42C5-9A08-99A1747288CB}" type="datetimeFigureOut">
               <a:rPr lang="en-IE" smtClean="0"/>
-              <a:t>06/10/2025</a:t>
+              <a:t>25/02/2026</a:t>
             </a:fld>
             <a:endParaRPr lang="en-IE"/>
           </a:p>
@@ -594,7 +594,7 @@
           <a:p>
             <a:fld id="{FD4AA955-FD35-42C5-9A08-99A1747288CB}" type="datetimeFigureOut">
               <a:rPr lang="en-IE" smtClean="0"/>
-              <a:t>06/10/2025</a:t>
+              <a:t>25/02/2026</a:t>
             </a:fld>
             <a:endParaRPr lang="en-IE"/>
           </a:p>
@@ -804,7 +804,7 @@
           <a:p>
             <a:fld id="{FD4AA955-FD35-42C5-9A08-99A1747288CB}" type="datetimeFigureOut">
               <a:rPr lang="en-IE" smtClean="0"/>
-              <a:t>06/10/2025</a:t>
+              <a:t>25/02/2026</a:t>
             </a:fld>
             <a:endParaRPr lang="en-IE"/>
           </a:p>
@@ -1004,7 +1004,7 @@
           <a:p>
             <a:fld id="{FD4AA955-FD35-42C5-9A08-99A1747288CB}" type="datetimeFigureOut">
               <a:rPr lang="en-IE" smtClean="0"/>
-              <a:t>06/10/2025</a:t>
+              <a:t>25/02/2026</a:t>
             </a:fld>
             <a:endParaRPr lang="en-IE"/>
           </a:p>
@@ -1280,7 +1280,7 @@
           <a:p>
             <a:fld id="{FD4AA955-FD35-42C5-9A08-99A1747288CB}" type="datetimeFigureOut">
               <a:rPr lang="en-IE" smtClean="0"/>
-              <a:t>06/10/2025</a:t>
+              <a:t>25/02/2026</a:t>
             </a:fld>
             <a:endParaRPr lang="en-IE"/>
           </a:p>
@@ -1548,7 +1548,7 @@
           <a:p>
             <a:fld id="{FD4AA955-FD35-42C5-9A08-99A1747288CB}" type="datetimeFigureOut">
               <a:rPr lang="en-IE" smtClean="0"/>
-              <a:t>06/10/2025</a:t>
+              <a:t>25/02/2026</a:t>
             </a:fld>
             <a:endParaRPr lang="en-IE"/>
           </a:p>
@@ -1963,7 +1963,7 @@
           <a:p>
             <a:fld id="{FD4AA955-FD35-42C5-9A08-99A1747288CB}" type="datetimeFigureOut">
               <a:rPr lang="en-IE" smtClean="0"/>
-              <a:t>06/10/2025</a:t>
+              <a:t>25/02/2026</a:t>
             </a:fld>
             <a:endParaRPr lang="en-IE"/>
           </a:p>
@@ -2105,7 +2105,7 @@
           <a:p>
             <a:fld id="{FD4AA955-FD35-42C5-9A08-99A1747288CB}" type="datetimeFigureOut">
               <a:rPr lang="en-IE" smtClean="0"/>
-              <a:t>06/10/2025</a:t>
+              <a:t>25/02/2026</a:t>
             </a:fld>
             <a:endParaRPr lang="en-IE"/>
           </a:p>
@@ -2218,7 +2218,7 @@
           <a:p>
             <a:fld id="{FD4AA955-FD35-42C5-9A08-99A1747288CB}" type="datetimeFigureOut">
               <a:rPr lang="en-IE" smtClean="0"/>
-              <a:t>06/10/2025</a:t>
+              <a:t>25/02/2026</a:t>
             </a:fld>
             <a:endParaRPr lang="en-IE"/>
           </a:p>
@@ -2531,7 +2531,7 @@
           <a:p>
             <a:fld id="{FD4AA955-FD35-42C5-9A08-99A1747288CB}" type="datetimeFigureOut">
               <a:rPr lang="en-IE" smtClean="0"/>
-              <a:t>06/10/2025</a:t>
+              <a:t>25/02/2026</a:t>
             </a:fld>
             <a:endParaRPr lang="en-IE"/>
           </a:p>
@@ -2820,7 +2820,7 @@
           <a:p>
             <a:fld id="{FD4AA955-FD35-42C5-9A08-99A1747288CB}" type="datetimeFigureOut">
               <a:rPr lang="en-IE" smtClean="0"/>
-              <a:t>06/10/2025</a:t>
+              <a:t>25/02/2026</a:t>
             </a:fld>
             <a:endParaRPr lang="en-IE"/>
           </a:p>
@@ -3063,7 +3063,7 @@
           <a:p>
             <a:fld id="{FD4AA955-FD35-42C5-9A08-99A1747288CB}" type="datetimeFigureOut">
               <a:rPr lang="en-IE" smtClean="0"/>
-              <a:t>06/10/2025</a:t>
+              <a:t>25/02/2026</a:t>
             </a:fld>
             <a:endParaRPr lang="en-IE"/>
           </a:p>
@@ -3692,8 +3692,21 @@
                   <a:srgbClr val="FFFFFF"/>
                 </a:solidFill>
               </a:rPr>
-              <a:t>Mujahid Tabassum 2025</a:t>
-            </a:r>
+              <a:t>Mujahid </a:t>
+            </a:r>
+            <a:r>
+              <a:rPr lang="en-IE" sz="1600">
+                <a:solidFill>
+                  <a:srgbClr val="FFFFFF"/>
+                </a:solidFill>
+              </a:rPr>
+              <a:t>Tabassum 2026</a:t>
+            </a:r>
+            <a:endParaRPr lang="en-IE" sz="1600" dirty="0">
+              <a:solidFill>
+                <a:srgbClr val="FFFFFF"/>
+              </a:solidFill>
+            </a:endParaRPr>
           </a:p>
         </p:txBody>
       </p:sp>
